--- a/outputs/produkte/mama-ceo/03-praesentationen/saeule-4/01-lektion-4-1.pptx
+++ b/outputs/produkte/mama-ceo/03-praesentationen/saeule-4/01-lektion-4-1.pptx
@@ -4069,6 +4069,14 @@
 <file path=ppt/slides/slide1.xml><?xml version="1.0" encoding="utf-8"?>
 <p:sld xmlns:a="http://schemas.openxmlformats.org/drawingml/2006/main" xmlns:p="http://schemas.openxmlformats.org/presentationml/2006/main" xmlns:r="http://schemas.openxmlformats.org/officeDocument/2006/relationships">
   <p:cSld>
+    <p:bg>
+      <p:bgPr>
+        <a:solidFill>
+          <a:srgbClr val="F1ECDD"/>
+        </a:solidFill>
+        <a:effectLst/>
+      </p:bgPr>
+    </p:bg>
     <p:spTree>
       <p:nvGrpSpPr>
         <p:cNvPr id="1" name=""/>
@@ -4344,6 +4352,14 @@
 <file path=ppt/slides/slide2.xml><?xml version="1.0" encoding="utf-8"?>
 <p:sld xmlns:a="http://schemas.openxmlformats.org/drawingml/2006/main" xmlns:p="http://schemas.openxmlformats.org/presentationml/2006/main" xmlns:r="http://schemas.openxmlformats.org/officeDocument/2006/relationships">
   <p:cSld>
+    <p:bg>
+      <p:bgPr>
+        <a:solidFill>
+          <a:srgbClr val="F1ECDD"/>
+        </a:solidFill>
+        <a:effectLst/>
+      </p:bgPr>
+    </p:bg>
     <p:spTree>
       <p:nvGrpSpPr>
         <p:cNvPr id="1" name=""/>
@@ -4419,7 +4435,7 @@
                 </a:solidFill>
                 <a:latin typeface="Calibri"/>
               </a:rPr>
-              <a:t>▸  </a:t>
+              <a:t>✓  </a:t>
             </a:r>
             <a:r>
               <a:rPr sz="1600" b="0">
@@ -4444,7 +4460,7 @@
                 </a:solidFill>
                 <a:latin typeface="Calibri"/>
               </a:rPr>
-              <a:t>▸  </a:t>
+              <a:t>✓  </a:t>
             </a:r>
             <a:r>
               <a:rPr sz="1600" b="0">
@@ -4469,7 +4485,7 @@
                 </a:solidFill>
                 <a:latin typeface="Calibri"/>
               </a:rPr>
-              <a:t>▸  </a:t>
+              <a:t>✓  </a:t>
             </a:r>
             <a:r>
               <a:rPr sz="1600" b="0">
@@ -4563,6 +4579,14 @@
 <file path=ppt/slides/slide3.xml><?xml version="1.0" encoding="utf-8"?>
 <p:sld xmlns:a="http://schemas.openxmlformats.org/drawingml/2006/main" xmlns:p="http://schemas.openxmlformats.org/presentationml/2006/main" xmlns:r="http://schemas.openxmlformats.org/officeDocument/2006/relationships">
   <p:cSld>
+    <p:bg>
+      <p:bgPr>
+        <a:solidFill>
+          <a:srgbClr val="F1ECDD"/>
+        </a:solidFill>
+        <a:effectLst/>
+      </p:bgPr>
+    </p:bg>
     <p:spTree>
       <p:nvGrpSpPr>
         <p:cNvPr id="1" name=""/>
@@ -4638,7 +4662,7 @@
                 </a:solidFill>
                 <a:latin typeface="Calibri"/>
               </a:rPr>
-              <a:t>▸  </a:t>
+              <a:t>✓  </a:t>
             </a:r>
             <a:r>
               <a:rPr sz="1600" b="0">
@@ -4663,7 +4687,7 @@
                 </a:solidFill>
                 <a:latin typeface="Calibri"/>
               </a:rPr>
-              <a:t>▸  </a:t>
+              <a:t>✓  </a:t>
             </a:r>
             <a:r>
               <a:rPr sz="1600" b="0">
@@ -4688,7 +4712,7 @@
                 </a:solidFill>
                 <a:latin typeface="Calibri"/>
               </a:rPr>
-              <a:t>▸  </a:t>
+              <a:t>✓  </a:t>
             </a:r>
             <a:r>
               <a:rPr sz="1600" b="0">
@@ -4782,6 +4806,14 @@
 <file path=ppt/slides/slide4.xml><?xml version="1.0" encoding="utf-8"?>
 <p:sld xmlns:a="http://schemas.openxmlformats.org/drawingml/2006/main" xmlns:p="http://schemas.openxmlformats.org/presentationml/2006/main" xmlns:r="http://schemas.openxmlformats.org/officeDocument/2006/relationships">
   <p:cSld>
+    <p:bg>
+      <p:bgPr>
+        <a:solidFill>
+          <a:srgbClr val="F1ECDD"/>
+        </a:solidFill>
+        <a:effectLst/>
+      </p:bgPr>
+    </p:bg>
     <p:spTree>
       <p:nvGrpSpPr>
         <p:cNvPr id="1" name=""/>
@@ -4857,7 +4889,7 @@
                 </a:solidFill>
                 <a:latin typeface="Calibri"/>
               </a:rPr>
-              <a:t>▸  </a:t>
+              <a:t>✓  </a:t>
             </a:r>
             <a:r>
               <a:rPr sz="1600" b="0">
@@ -4882,7 +4914,7 @@
                 </a:solidFill>
                 <a:latin typeface="Calibri"/>
               </a:rPr>
-              <a:t>▸  </a:t>
+              <a:t>✓  </a:t>
             </a:r>
             <a:r>
               <a:rPr sz="1600" b="0">
@@ -4907,7 +4939,7 @@
                 </a:solidFill>
                 <a:latin typeface="Calibri"/>
               </a:rPr>
-              <a:t>▸  </a:t>
+              <a:t>✓  </a:t>
             </a:r>
             <a:r>
               <a:rPr sz="1600" b="0">
@@ -5001,6 +5033,14 @@
 <file path=ppt/slides/slide5.xml><?xml version="1.0" encoding="utf-8"?>
 <p:sld xmlns:a="http://schemas.openxmlformats.org/drawingml/2006/main" xmlns:p="http://schemas.openxmlformats.org/presentationml/2006/main" xmlns:r="http://schemas.openxmlformats.org/officeDocument/2006/relationships">
   <p:cSld>
+    <p:bg>
+      <p:bgPr>
+        <a:solidFill>
+          <a:srgbClr val="F1ECDD"/>
+        </a:solidFill>
+        <a:effectLst/>
+      </p:bgPr>
+    </p:bg>
     <p:spTree>
       <p:nvGrpSpPr>
         <p:cNvPr id="1" name=""/>
@@ -5076,7 +5116,7 @@
                 </a:solidFill>
                 <a:latin typeface="Calibri"/>
               </a:rPr>
-              <a:t>▸  </a:t>
+              <a:t>✓  </a:t>
             </a:r>
             <a:r>
               <a:rPr sz="1600" b="0">
@@ -5101,7 +5141,7 @@
                 </a:solidFill>
                 <a:latin typeface="Calibri"/>
               </a:rPr>
-              <a:t>▸  </a:t>
+              <a:t>✓  </a:t>
             </a:r>
             <a:r>
               <a:rPr sz="1600" b="0">
@@ -5126,7 +5166,7 @@
                 </a:solidFill>
                 <a:latin typeface="Calibri"/>
               </a:rPr>
-              <a:t>▸  </a:t>
+              <a:t>✓  </a:t>
             </a:r>
             <a:r>
               <a:rPr sz="1600" b="0">
@@ -5220,6 +5260,14 @@
 <file path=ppt/slides/slide6.xml><?xml version="1.0" encoding="utf-8"?>
 <p:sld xmlns:a="http://schemas.openxmlformats.org/drawingml/2006/main" xmlns:p="http://schemas.openxmlformats.org/presentationml/2006/main" xmlns:r="http://schemas.openxmlformats.org/officeDocument/2006/relationships">
   <p:cSld>
+    <p:bg>
+      <p:bgPr>
+        <a:solidFill>
+          <a:srgbClr val="F1ECDD"/>
+        </a:solidFill>
+        <a:effectLst/>
+      </p:bgPr>
+    </p:bg>
     <p:spTree>
       <p:nvGrpSpPr>
         <p:cNvPr id="1" name=""/>
@@ -5295,7 +5343,7 @@
                 </a:solidFill>
                 <a:latin typeface="Calibri"/>
               </a:rPr>
-              <a:t>▸  </a:t>
+              <a:t>✓  </a:t>
             </a:r>
             <a:r>
               <a:rPr sz="1600" b="0">
@@ -5320,7 +5368,7 @@
                 </a:solidFill>
                 <a:latin typeface="Calibri"/>
               </a:rPr>
-              <a:t>▸  </a:t>
+              <a:t>✓  </a:t>
             </a:r>
             <a:r>
               <a:rPr sz="1600" b="0">
@@ -5345,7 +5393,7 @@
                 </a:solidFill>
                 <a:latin typeface="Calibri"/>
               </a:rPr>
-              <a:t>▸  </a:t>
+              <a:t>✓  </a:t>
             </a:r>
             <a:r>
               <a:rPr sz="1600" b="0">
@@ -5439,6 +5487,14 @@
 <file path=ppt/slides/slide7.xml><?xml version="1.0" encoding="utf-8"?>
 <p:sld xmlns:a="http://schemas.openxmlformats.org/drawingml/2006/main" xmlns:p="http://schemas.openxmlformats.org/presentationml/2006/main" xmlns:r="http://schemas.openxmlformats.org/officeDocument/2006/relationships">
   <p:cSld>
+    <p:bg>
+      <p:bgPr>
+        <a:solidFill>
+          <a:srgbClr val="F1ECDD"/>
+        </a:solidFill>
+        <a:effectLst/>
+      </p:bgPr>
+    </p:bg>
     <p:spTree>
       <p:nvGrpSpPr>
         <p:cNvPr id="1" name=""/>
@@ -5514,7 +5570,7 @@
                 </a:solidFill>
                 <a:latin typeface="Calibri"/>
               </a:rPr>
-              <a:t>▸  </a:t>
+              <a:t>✓  </a:t>
             </a:r>
             <a:r>
               <a:rPr sz="1600" b="0">
@@ -5539,7 +5595,7 @@
                 </a:solidFill>
                 <a:latin typeface="Calibri"/>
               </a:rPr>
-              <a:t>▸  </a:t>
+              <a:t>✓  </a:t>
             </a:r>
             <a:r>
               <a:rPr sz="1600" b="0">
@@ -5564,7 +5620,7 @@
                 </a:solidFill>
                 <a:latin typeface="Calibri"/>
               </a:rPr>
-              <a:t>▸  </a:t>
+              <a:t>✓  </a:t>
             </a:r>
             <a:r>
               <a:rPr sz="1600" b="0">
@@ -5658,6 +5714,14 @@
 <file path=ppt/slides/slide8.xml><?xml version="1.0" encoding="utf-8"?>
 <p:sld xmlns:a="http://schemas.openxmlformats.org/drawingml/2006/main" xmlns:p="http://schemas.openxmlformats.org/presentationml/2006/main" xmlns:r="http://schemas.openxmlformats.org/officeDocument/2006/relationships">
   <p:cSld>
+    <p:bg>
+      <p:bgPr>
+        <a:solidFill>
+          <a:srgbClr val="F1ECDD"/>
+        </a:solidFill>
+        <a:effectLst/>
+      </p:bgPr>
+    </p:bg>
     <p:spTree>
       <p:nvGrpSpPr>
         <p:cNvPr id="1" name=""/>
@@ -5733,7 +5797,7 @@
                 </a:solidFill>
                 <a:latin typeface="Calibri"/>
               </a:rPr>
-              <a:t>▸  </a:t>
+              <a:t>✓  </a:t>
             </a:r>
             <a:r>
               <a:rPr sz="1600" b="0">
@@ -5758,7 +5822,7 @@
                 </a:solidFill>
                 <a:latin typeface="Calibri"/>
               </a:rPr>
-              <a:t>▸  </a:t>
+              <a:t>✓  </a:t>
             </a:r>
             <a:r>
               <a:rPr sz="1600" b="0">
@@ -5783,7 +5847,7 @@
                 </a:solidFill>
                 <a:latin typeface="Calibri"/>
               </a:rPr>
-              <a:t>▸  </a:t>
+              <a:t>✓  </a:t>
             </a:r>
             <a:r>
               <a:rPr sz="1600" b="0">
@@ -5877,6 +5941,14 @@
 <file path=ppt/slides/slide9.xml><?xml version="1.0" encoding="utf-8"?>
 <p:sld xmlns:a="http://schemas.openxmlformats.org/drawingml/2006/main" xmlns:p="http://schemas.openxmlformats.org/presentationml/2006/main" xmlns:r="http://schemas.openxmlformats.org/officeDocument/2006/relationships">
   <p:cSld>
+    <p:bg>
+      <p:bgPr>
+        <a:solidFill>
+          <a:srgbClr val="F1ECDD"/>
+        </a:solidFill>
+        <a:effectLst/>
+      </p:bgPr>
+    </p:bg>
     <p:spTree>
       <p:nvGrpSpPr>
         <p:cNvPr id="1" name=""/>
@@ -5952,7 +6024,7 @@
                 </a:solidFill>
                 <a:latin typeface="Calibri"/>
               </a:rPr>
-              <a:t>▸  </a:t>
+              <a:t>✓  </a:t>
             </a:r>
             <a:r>
               <a:rPr sz="1600" b="0">
@@ -5977,7 +6049,7 @@
                 </a:solidFill>
                 <a:latin typeface="Calibri"/>
               </a:rPr>
-              <a:t>▸  </a:t>
+              <a:t>✓  </a:t>
             </a:r>
             <a:r>
               <a:rPr sz="1600" b="0">
